--- a/it/slides/17-Architettura_dei_Calcolatori-Verm1_Parte_3-Lab.pptx
+++ b/it/slides/17-Architettura_dei_Calcolatori-Verm1_Parte_3-Lab.pptx
@@ -143,25 +143,25 @@
   <p:extLst>
     <p:ext uri="{521415D9-36F7-43E2-AB2F-B90AF26B5E84}">
       <p14:sectionLst xmlns:p14="http://schemas.microsoft.com/office/powerpoint/2010/main">
-        <p14:section name="Apertura" id="{3c34f0e0-5dc2-9e9a-2022-39fbc9f52fc8}">
+        <p14:section name="Apertura" id="{9dfd3361-71b9-4c7e-c287-e06bfab8b0ea}">
           <p14:sldIdLst>
             <p14:sldId id="256"/>
             <p14:sldId id="257"/>
           </p14:sldIdLst>
         </p14:section>
-        <p14:section name="I listati" id="{d1db1c03-ad72-0695-e627-267749ed55b3}">
+        <p14:section name="I listati" id="{7a986859-bad1-e7e1-4886-32b4fbbe2754}">
           <p14:sldIdLst>
             <p14:sldId id="258"/>
           </p14:sldIdLst>
         </p14:section>
-        <p14:section name="Passo 1: la memoria del gioco" id="{176c6b28-4912-3c6b-a7ee-50ad7965a36c}">
+        <p14:section name="Passo 1: la memoria del gioco" id="{417b6c4c-a082-482b-8c11-dc3080c006c5}">
           <p14:sldIdLst>
             <p14:sldId id="259"/>
             <p14:sldId id="260"/>
             <p14:sldId id="261"/>
           </p14:sldIdLst>
         </p14:section>
-        <p14:section name="Passo 2: tre stati" id="{b0b42bbf-94ba-fac9-03fb-8722cfd0167a}">
+        <p14:section name="Passo 2: tre stati" id="{8c65d32a-f968-fbb6-379e-f2b37f4bea80}">
           <p14:sldIdLst>
             <p14:sldId id="262"/>
             <p14:sldId id="263"/>
@@ -172,7 +172,7 @@
             <p14:sldId id="268"/>
           </p14:sldIdLst>
         </p14:section>
-        <p14:section name="Passo 3: un verme in memoria" id="{f820be9d-e743-abb0-0f68-0f947342190d}">
+        <p14:section name="Passo 3: un verme in memoria" id="{33157d7d-7fc3-1c14-70c9-fa63a128c41f}">
           <p14:sldIdLst>
             <p14:sldId id="269"/>
             <p14:sldId id="270"/>
@@ -182,7 +182,7 @@
             <p14:sldId id="274"/>
           </p14:sldIdLst>
         </p14:section>
-        <p14:section name="Passo 4: le regole" id="{26a81201-6b6b-09d5-0d4e-609d982d06a1}">
+        <p14:section name="Passo 4: le regole" id="{e95f1fcc-7b72-84a3-eca2-dd34fea82b0d}">
           <p14:sldIdLst>
             <p14:sldId id="275"/>
             <p14:sldId id="276"/>
@@ -195,14 +195,14 @@
             <p14:sldId id="283"/>
           </p14:sldIdLst>
         </p14:section>
-        <p14:section name="Passo 5: guardare la memoria muoversi" id="{3c53d475-b43b-8972-5b5d-868885866d9f}">
+        <p14:section name="Passo 5: guardare la memoria muoversi" id="{95d7e5a4-424d-7087-a539-a6c9d841327b}">
           <p14:sldIdLst>
             <p14:sldId id="284"/>
             <p14:sldId id="285"/>
             <p14:sldId id="286"/>
           </p14:sldIdLst>
         </p14:section>
-        <p14:section name="Eseguire e provare" id="{b79b4416-6314-02e0-5833-2d8e359ed94e}">
+        <p14:section name="Eseguire e provare" id="{fcf2b4e6-ce0e-274c-2806-1f7b94c6f618}">
           <p14:sldIdLst>
             <p14:sldId id="287"/>
             <p14:sldId id="288"/>
@@ -211,7 +211,7 @@
             <p14:sldId id="291"/>
           </p14:sldIdLst>
         </p14:section>
-        <p14:section name="Esercizi" id="{3d54f78b-9b41-a93a-2e3a-968d41bd6212}">
+        <p14:section name="Esercizi" id="{fa950516-8b2d-c6ab-cc0e-6c2c39d54c42}">
           <p14:sldIdLst>
             <p14:sldId id="292"/>
           </p14:sldIdLst>

--- a/it/slides/17-Architettura_dei_Calcolatori-Verm1_Parte_3-Lab.pptx
+++ b/it/slides/17-Architettura_dei_Calcolatori-Verm1_Parte_3-Lab.pptx
@@ -143,25 +143,25 @@
   <p:extLst>
     <p:ext uri="{521415D9-36F7-43E2-AB2F-B90AF26B5E84}">
       <p14:sectionLst xmlns:p14="http://schemas.microsoft.com/office/powerpoint/2010/main">
-        <p14:section name="Apertura" id="{9dfd3361-71b9-4c7e-c287-e06bfab8b0ea}">
+        <p14:section name="Apertura" id="{ce97810e-9446-0b25-73b6-b0ed721bfe7a}">
           <p14:sldIdLst>
             <p14:sldId id="256"/>
             <p14:sldId id="257"/>
           </p14:sldIdLst>
         </p14:section>
-        <p14:section name="I listati" id="{7a986859-bad1-e7e1-4886-32b4fbbe2754}">
+        <p14:section name="I listati" id="{a7405512-de52-a182-3015-20f5de4affea}">
           <p14:sldIdLst>
             <p14:sldId id="258"/>
           </p14:sldIdLst>
         </p14:section>
-        <p14:section name="Passo 1: la memoria del gioco" id="{417b6c4c-a082-482b-8c11-dc3080c006c5}">
+        <p14:section name="Passo 1: la memoria del gioco" id="{d9b3cc1c-5109-ed96-de22-30e56e6f818e}">
           <p14:sldIdLst>
             <p14:sldId id="259"/>
             <p14:sldId id="260"/>
             <p14:sldId id="261"/>
           </p14:sldIdLst>
         </p14:section>
-        <p14:section name="Passo 2: tre stati" id="{8c65d32a-f968-fbb6-379e-f2b37f4bea80}">
+        <p14:section name="Passo 2: tre stati" id="{09a5cdea-cc9f-bf2a-0df6-305624a90d19}">
           <p14:sldIdLst>
             <p14:sldId id="262"/>
             <p14:sldId id="263"/>
@@ -172,7 +172,7 @@
             <p14:sldId id="268"/>
           </p14:sldIdLst>
         </p14:section>
-        <p14:section name="Passo 3: un verme in memoria" id="{33157d7d-7fc3-1c14-70c9-fa63a128c41f}">
+        <p14:section name="Passo 3: un verme in memoria" id="{f050ce8f-5785-3ced-6412-a38101aab120}">
           <p14:sldIdLst>
             <p14:sldId id="269"/>
             <p14:sldId id="270"/>
@@ -182,7 +182,7 @@
             <p14:sldId id="274"/>
           </p14:sldIdLst>
         </p14:section>
-        <p14:section name="Passo 4: le regole" id="{e95f1fcc-7b72-84a3-eca2-dd34fea82b0d}">
+        <p14:section name="Passo 4: le regole" id="{490efbe0-7ce3-10f4-46ae-a9ff95ff589f}">
           <p14:sldIdLst>
             <p14:sldId id="275"/>
             <p14:sldId id="276"/>
@@ -195,14 +195,14 @@
             <p14:sldId id="283"/>
           </p14:sldIdLst>
         </p14:section>
-        <p14:section name="Passo 5: guardare la memoria muoversi" id="{95d7e5a4-424d-7087-a539-a6c9d841327b}">
+        <p14:section name="Passo 5: guardare la memoria muoversi" id="{350da0e0-b369-bed2-5dbe-33a8360fad92}">
           <p14:sldIdLst>
             <p14:sldId id="284"/>
             <p14:sldId id="285"/>
             <p14:sldId id="286"/>
           </p14:sldIdLst>
         </p14:section>
-        <p14:section name="Eseguire e provare" id="{fcf2b4e6-ce0e-274c-2806-1f7b94c6f618}">
+        <p14:section name="Eseguire e provare" id="{79a39d1c-ecca-61af-0218-0aef99405992}">
           <p14:sldIdLst>
             <p14:sldId id="287"/>
             <p14:sldId id="288"/>
@@ -211,7 +211,7 @@
             <p14:sldId id="291"/>
           </p14:sldIdLst>
         </p14:section>
-        <p14:section name="Esercizi" id="{fa950516-8b2d-c6ab-cc0e-6c2c39d54c42}">
+        <p14:section name="Esercizi" id="{eaad2be9-7c34-cc50-8321-fec0b9ec6733}">
           <p14:sldIdLst>
             <p14:sldId id="292"/>
           </p14:sldIdLst>
@@ -622,7 +622,8 @@
               <a:rPr lang="en-US" dirty="0"/>
               <a:t>Questa è la presentazione del codice della Lezione 17. Mentre la presentazione della lezione sviluppa i concetti, questa raccoglie tutto ciò che si scrive e si esegue: ogni listato con il suo commento, il programma completo della lezione, il risultato che deve produrre, e la procedura per provarlo su ciascuno dei tre host. Le due presentazioni vanno lette insieme: i concetti spiegano il codice, e il codice dà ai concetti una conseguenza osservabile.
 Stato di apprendimento: DA COMPRENDERE OGGI, alla fine di questa lezione lo spiegate, lo seguite passo passo e lo applicate da soli; DA UTILIZZARE OGGI, oggi seguite e usate la ricetta; come funziona dentro si spiega più avanti, o non fa parte del corso; DA COMPRENDERE PIÙ AVANTI, riconoscete il nome e lo scopo; lo spiega una lezione successiva. Una slide senza etichetta è contesto: una storia, un esempio, una domanda, un esercizio.
-Stato di apprendimento di questa lezione. DA COMPRENDERE OGGI: gli array in memoria; macchine a stati finiti; .text, .rodata, .data; latch e flip-flop; la virgola fissa. DA UTILIZZARE OGGI: la convenzione di chiamata (Lezione 18) e, usati senza essere studiati nel corso, gli strumenti di PRG32, il debugger di PRG32-QT. DA COMPRENDERE PIÙ AVANTI: niente. Una slide senza etichetta è contesto: una storia, un esempio, una domanda, un esercizio.</a:t>
+Stato di apprendimento di questa lezione. DA COMPRENDERE OGGI: gli array in memoria; macchine a stati finiti; .text, .rodata, .data; latch e flip-flop; la virgola fissa. DA UTILIZZARE OGGI: la convenzione di chiamata (Lezione 18) e, usati senza essere studiati nel corso, gli strumenti di PRG32, il debugger di PRG32-QT. DA COMPRENDERE PIÙ AVANTI: niente. Una slide senza etichetta è contesto: una storia, un esempio, una domanda, un esercizio.
+Percorso. I risultati di oggi: (1) realizzare il gioco come macchina a stati con tre stati; (2) tenere il corpo in un buffer circolare e la griglia in un array di byte; (3) riconoscere una collisione leggendo la griglia. Si appoggia su: gli array in memoria (Lezione 04); macchine a stati finiti (Lezione 13); .text, .rodata, .data (Lezione 07); latch e flip-flop (Lezione 13); la virgola fissa (Lezione 06). Prossimo passo: Lezione 18, Il processore.</a:t>
             </a:r>
             <a:endParaRPr lang="en-US" dirty="0"/>
           </a:p>
